--- a/presentation.pptx
+++ b/presentation.pptx
@@ -15231,8 +15231,8 @@
         </p:nvSpPr>
         <p:spPr>
           <a:xfrm>
-            <a:off x="868680" y="2048256"/>
-            <a:ext cx="2286000" cy="420624"/>
+            <a:off x="868680" y="1987296"/>
+            <a:ext cx="2286000" cy="430887"/>
           </a:xfrm>
           <a:prstGeom prst="rect">
             <a:avLst/>
@@ -15251,7 +15251,7 @@
               </a:lnSpc>
             </a:pPr>
             <a:r>
-              <a:rPr sz="3100" b="1">
+              <a:rPr sz="2800" b="1" dirty="0">
                 <a:solidFill>
                   <a:srgbClr val="1565C0"/>
                 </a:solidFill>
@@ -15270,8 +15270,8 @@
         </p:nvSpPr>
         <p:spPr>
           <a:xfrm>
-            <a:off x="777240" y="2551176"/>
-            <a:ext cx="2468880" cy="276999"/>
+            <a:off x="777240" y="2414016"/>
+            <a:ext cx="2468880" cy="307777"/>
           </a:xfrm>
           <a:prstGeom prst="rect">
             <a:avLst/>
@@ -15290,7 +15290,7 @@
               </a:lnSpc>
             </a:pPr>
             <a:r>
-              <a:rPr b="0">
+              <a:rPr sz="2000" b="0">
                 <a:latin typeface="Aptos"/>
               </a:rPr>
               <a:t>original</a:t>
@@ -15306,8 +15306,8 @@
         </p:nvSpPr>
         <p:spPr>
           <a:xfrm>
-            <a:off x="3867912" y="2048256"/>
-            <a:ext cx="2560320" cy="420624"/>
+            <a:off x="3867912" y="1987296"/>
+            <a:ext cx="2560320" cy="430887"/>
           </a:xfrm>
           <a:prstGeom prst="rect">
             <a:avLst/>
@@ -15326,7 +15326,7 @@
               </a:lnSpc>
             </a:pPr>
             <a:r>
-              <a:rPr sz="3100" b="1">
+              <a:rPr sz="2800" b="1">
                 <a:solidFill>
                   <a:srgbClr val="48BFEB"/>
                 </a:solidFill>
@@ -15345,8 +15345,8 @@
         </p:nvSpPr>
         <p:spPr>
           <a:xfrm>
-            <a:off x="3776472" y="2551176"/>
-            <a:ext cx="2743200" cy="276999"/>
+            <a:off x="3776472" y="2414016"/>
+            <a:ext cx="2743200" cy="307777"/>
           </a:xfrm>
           <a:prstGeom prst="rect">
             <a:avLst/>
@@ -15365,7 +15365,7 @@
               </a:lnSpc>
             </a:pPr>
             <a:r>
-              <a:rPr b="0">
+              <a:rPr sz="2000" b="0">
                 <a:latin typeface="Aptos"/>
               </a:rPr>
               <a:t>internet-transmitted</a:t>
@@ -15381,8 +15381,8 @@
         </p:nvSpPr>
         <p:spPr>
           <a:xfrm>
-            <a:off x="7360920" y="2048256"/>
-            <a:ext cx="2286000" cy="420624"/>
+            <a:off x="7193280" y="1987296"/>
+            <a:ext cx="2286000" cy="430887"/>
           </a:xfrm>
           <a:prstGeom prst="rect">
             <a:avLst/>
@@ -15401,7 +15401,7 @@
               </a:lnSpc>
             </a:pPr>
             <a:r>
-              <a:rPr sz="3100" b="1">
+              <a:rPr sz="2800" b="1">
                 <a:solidFill>
                   <a:srgbClr val="E84D4D"/>
                 </a:solidFill>
@@ -15420,8 +15420,8 @@
         </p:nvSpPr>
         <p:spPr>
           <a:xfrm>
-            <a:off x="7269480" y="2551176"/>
-            <a:ext cx="2468880" cy="276999"/>
+            <a:off x="7101840" y="2414016"/>
+            <a:ext cx="2468880" cy="307777"/>
           </a:xfrm>
           <a:prstGeom prst="rect">
             <a:avLst/>
@@ -15440,7 +15440,7 @@
               </a:lnSpc>
             </a:pPr>
             <a:r>
-              <a:rPr b="0">
+              <a:rPr sz="2000" b="0" dirty="0">
                 <a:latin typeface="Aptos"/>
               </a:rPr>
               <a:t>re-digitized</a:t>
@@ -15450,60 +15450,14 @@
       </p:sp>
       <p:sp>
         <p:nvSpPr>
-          <p:cNvPr id="15" name="Rounded Rectangle 14"/>
-          <p:cNvSpPr/>
-          <p:nvPr/>
-        </p:nvSpPr>
-        <p:spPr>
-          <a:xfrm>
-            <a:off x="1189703" y="3429000"/>
-            <a:ext cx="6493125" cy="1572768"/>
-          </a:xfrm>
-          <a:prstGeom prst="roundRect">
-            <a:avLst/>
-          </a:prstGeom>
-          <a:solidFill>
-            <a:srgbClr val="FFFFFF"/>
-          </a:solidFill>
-          <a:ln w="13970">
-            <a:solidFill>
-              <a:srgbClr val="BEDCFA"/>
-            </a:solidFill>
-          </a:ln>
-        </p:spPr>
-        <p:style>
-          <a:lnRef idx="1">
-            <a:schemeClr val="accent1"/>
-          </a:lnRef>
-          <a:fillRef idx="3">
-            <a:schemeClr val="accent1"/>
-          </a:fillRef>
-          <a:effectRef idx="2">
-            <a:schemeClr val="accent1"/>
-          </a:effectRef>
-          <a:fontRef idx="minor">
-            <a:schemeClr val="lt1"/>
-          </a:fontRef>
-        </p:style>
-        <p:txBody>
-          <a:bodyPr rtlCol="0" anchor="ctr"/>
-          <a:lstStyle/>
-          <a:p>
-            <a:pPr algn="ctr"/>
-            <a:endParaRPr/>
-          </a:p>
-        </p:txBody>
-      </p:sp>
-      <p:sp>
-        <p:nvSpPr>
-          <p:cNvPr id="16" name="TextBox 15"/>
+          <p:cNvPr id="30" name="TextBox 29"/>
           <p:cNvSpPr txBox="1"/>
           <p:nvPr/>
         </p:nvSpPr>
         <p:spPr>
           <a:xfrm>
-            <a:off x="1625471" y="3657600"/>
-            <a:ext cx="2146244" cy="246221"/>
+            <a:off x="829057" y="3184115"/>
+            <a:ext cx="10518451" cy="615553"/>
           </a:xfrm>
           <a:prstGeom prst="rect">
             <a:avLst/>
@@ -15522,115 +15476,111 @@
               </a:lnSpc>
             </a:pPr>
             <a:r>
-              <a:rPr sz="1600" b="1" dirty="0">
-                <a:solidFill>
-                  <a:srgbClr val="091F38"/>
-                </a:solidFill>
+              <a:rPr sz="2000" b="1" dirty="0">
                 <a:latin typeface="Aptos"/>
               </a:rPr>
-              <a:t>Original</a:t>
-            </a:r>
-          </a:p>
-        </p:txBody>
-      </p:sp>
-      <p:sp>
-        <p:nvSpPr>
-          <p:cNvPr id="17" name="Rounded Rectangle 16"/>
-          <p:cNvSpPr/>
-          <p:nvPr/>
-        </p:nvSpPr>
-        <p:spPr>
-          <a:xfrm>
-            <a:off x="3840480" y="3730752"/>
-            <a:ext cx="2423160" cy="118872"/>
-          </a:xfrm>
-          <a:prstGeom prst="roundRect">
-            <a:avLst/>
-          </a:prstGeom>
-          <a:solidFill>
-            <a:srgbClr val="DDEDFC"/>
-          </a:solidFill>
-          <a:ln>
-            <a:noFill/>
-          </a:ln>
-        </p:spPr>
-        <p:style>
-          <a:lnRef idx="1">
-            <a:schemeClr val="accent1"/>
-          </a:lnRef>
-          <a:fillRef idx="3">
-            <a:schemeClr val="accent1"/>
-          </a:fillRef>
-          <a:effectRef idx="2">
-            <a:schemeClr val="accent1"/>
-          </a:effectRef>
-          <a:fontRef idx="minor">
-            <a:schemeClr val="lt1"/>
-          </a:fontRef>
-        </p:style>
-        <p:txBody>
-          <a:bodyPr rtlCol="0" anchor="ctr"/>
-          <a:lstStyle/>
-          <a:p>
-            <a:pPr algn="ctr"/>
-            <a:endParaRPr sz="1600"/>
-          </a:p>
-        </p:txBody>
-      </p:sp>
-      <p:sp>
-        <p:nvSpPr>
-          <p:cNvPr id="18" name="Rounded Rectangle 17"/>
-          <p:cNvSpPr/>
-          <p:nvPr/>
-        </p:nvSpPr>
-        <p:spPr>
-          <a:xfrm>
-            <a:off x="3840480" y="3730752"/>
-            <a:ext cx="2294005" cy="118872"/>
-          </a:xfrm>
-          <a:prstGeom prst="roundRect">
-            <a:avLst/>
-          </a:prstGeom>
-          <a:solidFill>
-            <a:srgbClr val="1565C0"/>
-          </a:solidFill>
-          <a:ln>
-            <a:noFill/>
-          </a:ln>
-        </p:spPr>
-        <p:style>
-          <a:lnRef idx="1">
-            <a:schemeClr val="accent1"/>
-          </a:lnRef>
-          <a:fillRef idx="3">
-            <a:schemeClr val="accent1"/>
-          </a:fillRef>
-          <a:effectRef idx="2">
-            <a:schemeClr val="accent1"/>
-          </a:effectRef>
-          <a:fontRef idx="minor">
-            <a:schemeClr val="lt1"/>
-          </a:fontRef>
-        </p:style>
-        <p:txBody>
-          <a:bodyPr rtlCol="0" anchor="ctr"/>
-          <a:lstStyle/>
-          <a:p>
-            <a:pPr algn="ctr"/>
-            <a:endParaRPr sz="1600"/>
-          </a:p>
-        </p:txBody>
-      </p:sp>
-      <p:sp>
-        <p:nvSpPr>
-          <p:cNvPr id="19" name="TextBox 18"/>
+              <a:t>Re-digitization</a:t>
+            </a:r>
+            <a:r>
+              <a:rPr sz="2000" b="0" dirty="0">
+                <a:latin typeface="Aptos"/>
+              </a:rPr>
+              <a:t> is the weakest condition for the </a:t>
+            </a:r>
+            <a:r>
+              <a:rPr sz="2000" b="1" dirty="0">
+                <a:latin typeface="Aptos"/>
+              </a:rPr>
+              <a:t>RGB </a:t>
+            </a:r>
+            <a:r>
+              <a:rPr lang="it-IT" sz="2000" b="1" dirty="0">
+                <a:latin typeface="Aptos"/>
+              </a:rPr>
+              <a:t>fake-</a:t>
+            </a:r>
+            <a:r>
+              <a:rPr lang="it-IT" sz="2000" b="1" dirty="0" err="1">
+                <a:latin typeface="Aptos"/>
+              </a:rPr>
+              <a:t>only</a:t>
+            </a:r>
+            <a:r>
+              <a:rPr lang="it-IT" sz="2000" b="1" dirty="0">
+                <a:latin typeface="Aptos"/>
+              </a:rPr>
+              <a:t> </a:t>
+            </a:r>
+            <a:r>
+              <a:rPr sz="2000" b="0" dirty="0">
+                <a:latin typeface="Aptos"/>
+              </a:rPr>
+              <a:t>model</a:t>
+            </a:r>
+            <a:r>
+              <a:rPr lang="it-IT" sz="2000" dirty="0">
+                <a:latin typeface="Aptos"/>
+              </a:rPr>
+              <a:t>, </a:t>
+            </a:r>
+            <a:r>
+              <a:rPr lang="it-IT" sz="2000" dirty="0" err="1">
+                <a:latin typeface="Aptos"/>
+              </a:rPr>
+              <a:t>likely</a:t>
+            </a:r>
+            <a:r>
+              <a:rPr lang="it-IT" sz="2000" dirty="0">
+                <a:latin typeface="Aptos"/>
+              </a:rPr>
+              <a:t> </a:t>
+            </a:r>
+            <a:r>
+              <a:rPr lang="it-IT" sz="2000" dirty="0" err="1">
+                <a:latin typeface="Aptos"/>
+              </a:rPr>
+              <a:t>because</a:t>
+            </a:r>
+            <a:r>
+              <a:rPr lang="it-IT" sz="2000" dirty="0">
+                <a:latin typeface="Aptos"/>
+              </a:rPr>
+              <a:t> </a:t>
+            </a:r>
+            <a:r>
+              <a:rPr lang="it-IT" sz="2000" dirty="0" err="1">
+                <a:latin typeface="Aptos"/>
+              </a:rPr>
+              <a:t>it</a:t>
+            </a:r>
+            <a:r>
+              <a:rPr sz="2000" b="0" dirty="0">
+                <a:latin typeface="Aptos"/>
+              </a:rPr>
+              <a:t> introduces blur, color shifts and geometric distortions.</a:t>
+            </a:r>
+            <a:endParaRPr lang="it-IT" sz="2000" b="0" dirty="0">
+              <a:latin typeface="Aptos"/>
+            </a:endParaRPr>
+          </a:p>
+        </p:txBody>
+      </p:sp>
+      <p:sp>
+        <p:nvSpPr>
+          <p:cNvPr id="33" name="TextBox 32">
+            <a:extLst>
+              <a:ext uri="{FF2B5EF4-FFF2-40B4-BE49-F238E27FC236}">
+                <a16:creationId xmlns:a16="http://schemas.microsoft.com/office/drawing/2014/main" id="{BAD20FFE-8879-FEC3-408C-F43C96B92AD8}"/>
+              </a:ext>
+            </a:extLst>
+          </p:cNvPr>
           <p:cNvSpPr txBox="1"/>
           <p:nvPr/>
         </p:nvSpPr>
         <p:spPr>
           <a:xfrm>
-            <a:off x="6512396" y="3666744"/>
-            <a:ext cx="731520" cy="246221"/>
+            <a:off x="694944" y="4348632"/>
+            <a:ext cx="8253986" cy="400110"/>
           </a:xfrm>
           <a:prstGeom prst="rect">
             <a:avLst/>
@@ -15638,38 +15588,130 @@
           <a:noFill/>
         </p:spPr>
         <p:txBody>
+          <a:bodyPr wrap="square">
+            <a:spAutoFit/>
+          </a:bodyPr>
+          <a:lstStyle/>
+          <a:p>
+            <a:r>
+              <a:rPr lang="en-US" sz="2000" dirty="0"/>
+              <a:t>This result is </a:t>
+            </a:r>
+            <a:r>
+              <a:rPr lang="it-IT" sz="2000" dirty="0" err="1"/>
+              <a:t>also</a:t>
+            </a:r>
+            <a:r>
+              <a:rPr lang="it-IT" sz="2000" dirty="0"/>
+              <a:t> </a:t>
+            </a:r>
+            <a:r>
+              <a:rPr lang="it-IT" sz="2000" dirty="0" err="1"/>
+              <a:t>confirmed</a:t>
+            </a:r>
+            <a:r>
+              <a:rPr lang="it-IT" sz="2000" dirty="0"/>
+              <a:t> by the best multi-task </a:t>
+            </a:r>
+            <a:r>
+              <a:rPr lang="it-IT" sz="2000" dirty="0" err="1"/>
+              <a:t>configuration</a:t>
+            </a:r>
+            <a:r>
+              <a:rPr lang="it-IT" sz="2000" dirty="0"/>
+              <a:t>, </a:t>
+            </a:r>
+            <a:r>
+              <a:rPr lang="it-IT" sz="2000" b="1" dirty="0"/>
+              <a:t>MT 2:1</a:t>
+            </a:r>
+            <a:r>
+              <a:rPr lang="it-IT" sz="2000" dirty="0"/>
+              <a:t>.</a:t>
+            </a:r>
+            <a:endParaRPr lang="en-US" sz="2000" b="0" dirty="0"/>
+          </a:p>
+        </p:txBody>
+      </p:sp>
+      <p:sp>
+        <p:nvSpPr>
+          <p:cNvPr id="35" name="TextBox 34">
+            <a:extLst>
+              <a:ext uri="{FF2B5EF4-FFF2-40B4-BE49-F238E27FC236}">
+                <a16:creationId xmlns:a16="http://schemas.microsoft.com/office/drawing/2014/main" id="{9022697E-292B-A443-2B15-0EDDCB8BCE78}"/>
+              </a:ext>
+            </a:extLst>
+          </p:cNvPr>
+          <p:cNvSpPr txBox="1"/>
+          <p:nvPr/>
+        </p:nvSpPr>
+        <p:spPr>
+          <a:xfrm>
+            <a:off x="1082040" y="5066251"/>
+            <a:ext cx="2286000" cy="430887"/>
+          </a:xfrm>
+          <a:prstGeom prst="rect">
+            <a:avLst/>
+          </a:prstGeom>
+          <a:noFill/>
+        </p:spPr>
+        <p:txBody>
           <a:bodyPr wrap="square" lIns="0" tIns="0" rIns="0" bIns="0" anchor="t">
             <a:spAutoFit/>
           </a:bodyPr>
           <a:lstStyle/>
           <a:p>
-            <a:pPr algn="l">
+            <a:pPr algn="ctr">
               <a:lnSpc>
                 <a:spcPct val="100000"/>
               </a:lnSpc>
             </a:pPr>
             <a:r>
-              <a:rPr sz="1600" b="1">
+              <a:rPr sz="2800" b="1" dirty="0">
                 <a:solidFill>
-                  <a:srgbClr val="091F38"/>
+                  <a:srgbClr val="1565C0"/>
                 </a:solidFill>
                 <a:latin typeface="Aptos"/>
               </a:rPr>
-              <a:t>94.67%</a:t>
-            </a:r>
-          </a:p>
-        </p:txBody>
-      </p:sp>
-      <p:sp>
-        <p:nvSpPr>
-          <p:cNvPr id="20" name="TextBox 19"/>
+              <a:t>9</a:t>
+            </a:r>
+            <a:r>
+              <a:rPr lang="it-IT" sz="2800" b="1" dirty="0">
+                <a:solidFill>
+                  <a:srgbClr val="1565C0"/>
+                </a:solidFill>
+                <a:latin typeface="Aptos"/>
+              </a:rPr>
+              <a:t>3.33</a:t>
+            </a:r>
+            <a:r>
+              <a:rPr sz="2800" b="1" dirty="0">
+                <a:solidFill>
+                  <a:srgbClr val="1565C0"/>
+                </a:solidFill>
+                <a:latin typeface="Aptos"/>
+              </a:rPr>
+              <a:t>%</a:t>
+            </a:r>
+          </a:p>
+        </p:txBody>
+      </p:sp>
+      <p:sp>
+        <p:nvSpPr>
+          <p:cNvPr id="37" name="TextBox 36">
+            <a:extLst>
+              <a:ext uri="{FF2B5EF4-FFF2-40B4-BE49-F238E27FC236}">
+                <a16:creationId xmlns:a16="http://schemas.microsoft.com/office/drawing/2014/main" id="{AF10F06C-4A96-AE84-9B8D-D7DB6656BDF8}"/>
+              </a:ext>
+            </a:extLst>
+          </p:cNvPr>
           <p:cNvSpPr txBox="1"/>
           <p:nvPr/>
         </p:nvSpPr>
         <p:spPr>
           <a:xfrm>
-            <a:off x="1625471" y="4078224"/>
-            <a:ext cx="2146244" cy="246221"/>
+            <a:off x="990600" y="5477731"/>
+            <a:ext cx="2468880" cy="307777"/>
           </a:xfrm>
           <a:prstGeom prst="rect">
             <a:avLst/>
@@ -15682,121 +15724,36 @@
           </a:bodyPr>
           <a:lstStyle/>
           <a:p>
-            <a:pPr algn="l">
+            <a:pPr algn="ctr">
               <a:lnSpc>
                 <a:spcPct val="100000"/>
               </a:lnSpc>
             </a:pPr>
             <a:r>
-              <a:rPr sz="1600" b="1" dirty="0">
-                <a:solidFill>
-                  <a:srgbClr val="091F38"/>
-                </a:solidFill>
+              <a:rPr sz="2000" b="0">
                 <a:latin typeface="Aptos"/>
               </a:rPr>
-              <a:t>Internet-transmitted</a:t>
-            </a:r>
-          </a:p>
-        </p:txBody>
-      </p:sp>
-      <p:sp>
-        <p:nvSpPr>
-          <p:cNvPr id="21" name="Rounded Rectangle 20"/>
-          <p:cNvSpPr/>
-          <p:nvPr/>
-        </p:nvSpPr>
-        <p:spPr>
-          <a:xfrm>
-            <a:off x="3840480" y="4151376"/>
-            <a:ext cx="2423160" cy="118872"/>
-          </a:xfrm>
-          <a:prstGeom prst="roundRect">
-            <a:avLst/>
-          </a:prstGeom>
-          <a:solidFill>
-            <a:srgbClr val="DDEDFC"/>
-          </a:solidFill>
-          <a:ln>
-            <a:noFill/>
-          </a:ln>
-        </p:spPr>
-        <p:style>
-          <a:lnRef idx="1">
-            <a:schemeClr val="accent1"/>
-          </a:lnRef>
-          <a:fillRef idx="3">
-            <a:schemeClr val="accent1"/>
-          </a:fillRef>
-          <a:effectRef idx="2">
-            <a:schemeClr val="accent1"/>
-          </a:effectRef>
-          <a:fontRef idx="minor">
-            <a:schemeClr val="lt1"/>
-          </a:fontRef>
-        </p:style>
-        <p:txBody>
-          <a:bodyPr rtlCol="0" anchor="ctr"/>
-          <a:lstStyle/>
-          <a:p>
-            <a:pPr algn="ctr"/>
-            <a:endParaRPr sz="1600"/>
-          </a:p>
-        </p:txBody>
-      </p:sp>
-      <p:sp>
-        <p:nvSpPr>
-          <p:cNvPr id="22" name="Rounded Rectangle 21"/>
-          <p:cNvSpPr/>
-          <p:nvPr/>
-        </p:nvSpPr>
-        <p:spPr>
-          <a:xfrm>
-            <a:off x="3840480" y="4151376"/>
-            <a:ext cx="2245542" cy="118872"/>
-          </a:xfrm>
-          <a:prstGeom prst="roundRect">
-            <a:avLst/>
-          </a:prstGeom>
-          <a:solidFill>
-            <a:srgbClr val="48BFEB"/>
-          </a:solidFill>
-          <a:ln>
-            <a:noFill/>
-          </a:ln>
-        </p:spPr>
-        <p:style>
-          <a:lnRef idx="1">
-            <a:schemeClr val="accent1"/>
-          </a:lnRef>
-          <a:fillRef idx="3">
-            <a:schemeClr val="accent1"/>
-          </a:fillRef>
-          <a:effectRef idx="2">
-            <a:schemeClr val="accent1"/>
-          </a:effectRef>
-          <a:fontRef idx="minor">
-            <a:schemeClr val="lt1"/>
-          </a:fontRef>
-        </p:style>
-        <p:txBody>
-          <a:bodyPr rtlCol="0" anchor="ctr"/>
-          <a:lstStyle/>
-          <a:p>
-            <a:pPr algn="ctr"/>
-            <a:endParaRPr sz="1600"/>
-          </a:p>
-        </p:txBody>
-      </p:sp>
-      <p:sp>
-        <p:nvSpPr>
-          <p:cNvPr id="23" name="TextBox 22"/>
+              <a:t>original</a:t>
+            </a:r>
+          </a:p>
+        </p:txBody>
+      </p:sp>
+      <p:sp>
+        <p:nvSpPr>
+          <p:cNvPr id="39" name="TextBox 38">
+            <a:extLst>
+              <a:ext uri="{FF2B5EF4-FFF2-40B4-BE49-F238E27FC236}">
+                <a16:creationId xmlns:a16="http://schemas.microsoft.com/office/drawing/2014/main" id="{3A33AB83-D25B-DAE6-39AF-74A26F11664D}"/>
+              </a:ext>
+            </a:extLst>
+          </p:cNvPr>
           <p:cNvSpPr txBox="1"/>
           <p:nvPr/>
         </p:nvSpPr>
         <p:spPr>
           <a:xfrm>
-            <a:off x="6512396" y="4087367"/>
-            <a:ext cx="731520" cy="246221"/>
+            <a:off x="4081272" y="5066251"/>
+            <a:ext cx="2560320" cy="430887"/>
           </a:xfrm>
           <a:prstGeom prst="rect">
             <a:avLst/>
@@ -15809,15 +15766,15 @@
           </a:bodyPr>
           <a:lstStyle/>
           <a:p>
-            <a:pPr algn="l">
+            <a:pPr algn="ctr">
               <a:lnSpc>
                 <a:spcPct val="100000"/>
               </a:lnSpc>
             </a:pPr>
             <a:r>
-              <a:rPr sz="1600" b="1">
+              <a:rPr sz="2800" b="1">
                 <a:solidFill>
-                  <a:srgbClr val="091F38"/>
+                  <a:srgbClr val="48BFEB"/>
                 </a:solidFill>
                 <a:latin typeface="Aptos"/>
               </a:rPr>
@@ -15828,14 +15785,20 @@
       </p:sp>
       <p:sp>
         <p:nvSpPr>
-          <p:cNvPr id="24" name="TextBox 23"/>
+          <p:cNvPr id="41" name="TextBox 40">
+            <a:extLst>
+              <a:ext uri="{FF2B5EF4-FFF2-40B4-BE49-F238E27FC236}">
+                <a16:creationId xmlns:a16="http://schemas.microsoft.com/office/drawing/2014/main" id="{8D0F7261-8AEB-7D8E-E0E2-66C3F46A22BD}"/>
+              </a:ext>
+            </a:extLst>
+          </p:cNvPr>
           <p:cNvSpPr txBox="1"/>
           <p:nvPr/>
         </p:nvSpPr>
         <p:spPr>
           <a:xfrm>
-            <a:off x="1625471" y="4498848"/>
-            <a:ext cx="2146244" cy="246221"/>
+            <a:off x="3989832" y="5477731"/>
+            <a:ext cx="2743200" cy="307777"/>
           </a:xfrm>
           <a:prstGeom prst="rect">
             <a:avLst/>
@@ -15848,121 +15811,36 @@
           </a:bodyPr>
           <a:lstStyle/>
           <a:p>
-            <a:pPr algn="l">
+            <a:pPr algn="ctr">
               <a:lnSpc>
                 <a:spcPct val="100000"/>
               </a:lnSpc>
             </a:pPr>
             <a:r>
-              <a:rPr sz="1600" b="1">
-                <a:solidFill>
-                  <a:srgbClr val="091F38"/>
-                </a:solidFill>
+              <a:rPr sz="2000" b="0">
                 <a:latin typeface="Aptos"/>
               </a:rPr>
-              <a:t>Re-digitized</a:t>
-            </a:r>
-          </a:p>
-        </p:txBody>
-      </p:sp>
-      <p:sp>
-        <p:nvSpPr>
-          <p:cNvPr id="25" name="Rounded Rectangle 24"/>
-          <p:cNvSpPr/>
-          <p:nvPr/>
-        </p:nvSpPr>
-        <p:spPr>
-          <a:xfrm>
-            <a:off x="3840480" y="4572000"/>
-            <a:ext cx="2423160" cy="118872"/>
-          </a:xfrm>
-          <a:prstGeom prst="roundRect">
-            <a:avLst/>
-          </a:prstGeom>
-          <a:solidFill>
-            <a:srgbClr val="DDEDFC"/>
-          </a:solidFill>
-          <a:ln>
-            <a:noFill/>
-          </a:ln>
-        </p:spPr>
-        <p:style>
-          <a:lnRef idx="1">
-            <a:schemeClr val="accent1"/>
-          </a:lnRef>
-          <a:fillRef idx="3">
-            <a:schemeClr val="accent1"/>
-          </a:fillRef>
-          <a:effectRef idx="2">
-            <a:schemeClr val="accent1"/>
-          </a:effectRef>
-          <a:fontRef idx="minor">
-            <a:schemeClr val="lt1"/>
-          </a:fontRef>
-        </p:style>
-        <p:txBody>
-          <a:bodyPr rtlCol="0" anchor="ctr"/>
-          <a:lstStyle/>
-          <a:p>
-            <a:pPr algn="ctr"/>
-            <a:endParaRPr sz="1600"/>
-          </a:p>
-        </p:txBody>
-      </p:sp>
-      <p:sp>
-        <p:nvSpPr>
-          <p:cNvPr id="26" name="Rounded Rectangle 25"/>
-          <p:cNvSpPr/>
-          <p:nvPr/>
-        </p:nvSpPr>
-        <p:spPr>
-          <a:xfrm>
-            <a:off x="3840480" y="4572000"/>
-            <a:ext cx="2197079" cy="118872"/>
-          </a:xfrm>
-          <a:prstGeom prst="roundRect">
-            <a:avLst/>
-          </a:prstGeom>
-          <a:solidFill>
-            <a:srgbClr val="E84D4D"/>
-          </a:solidFill>
-          <a:ln>
-            <a:noFill/>
-          </a:ln>
-        </p:spPr>
-        <p:style>
-          <a:lnRef idx="1">
-            <a:schemeClr val="accent1"/>
-          </a:lnRef>
-          <a:fillRef idx="3">
-            <a:schemeClr val="accent1"/>
-          </a:fillRef>
-          <a:effectRef idx="2">
-            <a:schemeClr val="accent1"/>
-          </a:effectRef>
-          <a:fontRef idx="minor">
-            <a:schemeClr val="lt1"/>
-          </a:fontRef>
-        </p:style>
-        <p:txBody>
-          <a:bodyPr rtlCol="0" anchor="ctr"/>
-          <a:lstStyle/>
-          <a:p>
-            <a:pPr algn="ctr"/>
-            <a:endParaRPr sz="1600"/>
-          </a:p>
-        </p:txBody>
-      </p:sp>
-      <p:sp>
-        <p:nvSpPr>
-          <p:cNvPr id="27" name="TextBox 26"/>
+              <a:t>internet-transmitted</a:t>
+            </a:r>
+          </a:p>
+        </p:txBody>
+      </p:sp>
+      <p:sp>
+        <p:nvSpPr>
+          <p:cNvPr id="43" name="TextBox 42">
+            <a:extLst>
+              <a:ext uri="{FF2B5EF4-FFF2-40B4-BE49-F238E27FC236}">
+                <a16:creationId xmlns:a16="http://schemas.microsoft.com/office/drawing/2014/main" id="{BDBFD84B-CD90-2735-D432-A8BB112693B9}"/>
+              </a:ext>
+            </a:extLst>
+          </p:cNvPr>
           <p:cNvSpPr txBox="1"/>
           <p:nvPr/>
         </p:nvSpPr>
         <p:spPr>
           <a:xfrm>
-            <a:off x="6512396" y="4507992"/>
-            <a:ext cx="731520" cy="246221"/>
+            <a:off x="7406640" y="5066251"/>
+            <a:ext cx="2286000" cy="430887"/>
           </a:xfrm>
           <a:prstGeom prst="rect">
             <a:avLst/>
@@ -15975,33 +15853,57 @@
           </a:bodyPr>
           <a:lstStyle/>
           <a:p>
-            <a:pPr algn="l">
+            <a:pPr algn="ctr">
               <a:lnSpc>
                 <a:spcPct val="100000"/>
               </a:lnSpc>
             </a:pPr>
             <a:r>
-              <a:rPr sz="1600" b="1">
+              <a:rPr sz="2800" b="1" dirty="0">
                 <a:solidFill>
-                  <a:srgbClr val="091F38"/>
+                  <a:srgbClr val="E84D4D"/>
                 </a:solidFill>
                 <a:latin typeface="Aptos"/>
               </a:rPr>
-              <a:t>90.67%</a:t>
-            </a:r>
-          </a:p>
-        </p:txBody>
-      </p:sp>
-      <p:sp>
-        <p:nvSpPr>
-          <p:cNvPr id="30" name="TextBox 29"/>
+              <a:t>9</a:t>
+            </a:r>
+            <a:r>
+              <a:rPr lang="it-IT" sz="2800" b="1" dirty="0">
+                <a:solidFill>
+                  <a:srgbClr val="E84D4D"/>
+                </a:solidFill>
+                <a:latin typeface="Aptos"/>
+              </a:rPr>
+              <a:t>1.33</a:t>
+            </a:r>
+            <a:r>
+              <a:rPr sz="2800" b="1" dirty="0">
+                <a:solidFill>
+                  <a:srgbClr val="E84D4D"/>
+                </a:solidFill>
+                <a:latin typeface="Aptos"/>
+              </a:rPr>
+              <a:t>%</a:t>
+            </a:r>
+          </a:p>
+        </p:txBody>
+      </p:sp>
+      <p:sp>
+        <p:nvSpPr>
+          <p:cNvPr id="45" name="TextBox 44">
+            <a:extLst>
+              <a:ext uri="{FF2B5EF4-FFF2-40B4-BE49-F238E27FC236}">
+                <a16:creationId xmlns:a16="http://schemas.microsoft.com/office/drawing/2014/main" id="{033A0E9A-BA4F-9051-52CF-CF9F944A6635}"/>
+              </a:ext>
+            </a:extLst>
+          </p:cNvPr>
           <p:cNvSpPr txBox="1"/>
           <p:nvPr/>
         </p:nvSpPr>
         <p:spPr>
           <a:xfrm>
-            <a:off x="1189703" y="5449824"/>
-            <a:ext cx="9514479" cy="553998"/>
+            <a:off x="7315200" y="5477731"/>
+            <a:ext cx="2468880" cy="307777"/>
           </a:xfrm>
           <a:prstGeom prst="rect">
             <a:avLst/>
@@ -16014,52 +15916,16 @@
           </a:bodyPr>
           <a:lstStyle/>
           <a:p>
-            <a:pPr algn="l">
+            <a:pPr algn="ctr">
               <a:lnSpc>
                 <a:spcPct val="100000"/>
               </a:lnSpc>
             </a:pPr>
             <a:r>
-              <a:rPr b="0" dirty="0">
+              <a:rPr sz="2000" b="0">
                 <a:latin typeface="Aptos"/>
               </a:rPr>
-              <a:t>Re-digitization is the weakest condition for the RGB </a:t>
-            </a:r>
-            <a:r>
-              <a:rPr lang="it-IT" b="0" dirty="0">
-                <a:latin typeface="Aptos"/>
-              </a:rPr>
-              <a:t>fake-</a:t>
-            </a:r>
-            <a:r>
-              <a:rPr lang="it-IT" b="0" dirty="0" err="1">
-                <a:latin typeface="Aptos"/>
-              </a:rPr>
-              <a:t>only</a:t>
-            </a:r>
-            <a:r>
-              <a:rPr lang="it-IT" b="0" dirty="0">
-                <a:latin typeface="Aptos"/>
-              </a:rPr>
-              <a:t> </a:t>
-            </a:r>
-            <a:r>
-              <a:rPr b="0" dirty="0">
-                <a:latin typeface="Aptos"/>
-              </a:rPr>
-              <a:t>model</a:t>
-            </a:r>
-            <a:r>
-              <a:rPr lang="it-IT" b="0" dirty="0">
-                <a:latin typeface="Aptos"/>
-              </a:rPr>
-              <a:t>. I</a:t>
-            </a:r>
-            <a:r>
-              <a:rPr b="0" dirty="0">
-                <a:latin typeface="Aptos"/>
-              </a:rPr>
-              <a:t>t introduces blur, color shifts and geometric distortions.</a:t>
+              <a:t>re-digitized</a:t>
             </a:r>
           </a:p>
         </p:txBody>
